--- a/docs/investor-materials/v1.5/executive-protection/CTDI-pitch-deck-executive-protection.pptx
+++ b/docs/investor-materials/v1.5/executive-protection/CTDI-pitch-deck-executive-protection.pptx
@@ -3197,7 +3197,7 @@
               <a:defRPr sz="1800"/>
             </a:pPr>
             <a:r>
-              <a:t>Business Source License 1.1 adopted 2026-08-24 — Licensor: [operator LLC], LLC</a:t>
+              <a:t>Business Source License 1.1 adopted 2026-08-24 — Licensor: CS Executive Services, LLC</a:t>
             </a:r>
           </a:p>
           <a:p>
@@ -3672,7 +3672,7 @@
               <a:defRPr sz="1800"/>
             </a:pPr>
             <a:r>
-              <a:t>Built and run daily by a single founder — [operator LLC], LLC, Arlington, VA</a:t>
+              <a:t>Built and run daily by a single founder — CS Executive Services, LLC, Arlington, VA</a:t>
             </a:r>
           </a:p>
           <a:p>
